--- a/templates/hust/template.pptx
+++ b/templates/hust/template.pptx
@@ -3637,7 +3637,7 @@
           <a:noFill/>
         </p:spPr>
         <p:txBody>
-          <a:bodyPr wrap="square" rtlCol="0">
+          <a:bodyPr wrap="none" rtlCol="0">
             <a:noAutofit/>
           </a:bodyPr>
           <a:lstStyle/>
